--- a/teaching/stats/Template_Statistics_for_Proteomics.pptx
+++ b/teaching/stats/Template_Statistics_for_Proteomics.pptx
@@ -268,7 +268,7 @@
           <a:p>
             <a:fld id="{02AC24A9-CCB6-4F8D-B8DB-C2F3692CFA5A}" type="datetimeFigureOut">
               <a:rPr lang="en-US" smtClean="0"/>
-              <a:t>11/25/20</a:t>
+              <a:t>12/3/20</a:t>
             </a:fld>
             <a:endParaRPr lang="en-US" dirty="0"/>
           </a:p>
@@ -638,7 +638,7 @@
           <a:p>
             <a:fld id="{02AC24A9-CCB6-4F8D-B8DB-C2F3692CFA5A}" type="datetimeFigureOut">
               <a:rPr lang="en-US" smtClean="0"/>
-              <a:t>11/25/20</a:t>
+              <a:t>12/3/20</a:t>
             </a:fld>
             <a:endParaRPr lang="en-US"/>
           </a:p>
@@ -847,7 +847,7 @@
           <a:p>
             <a:fld id="{02AC24A9-CCB6-4F8D-B8DB-C2F3692CFA5A}" type="datetimeFigureOut">
               <a:rPr lang="en-US" smtClean="0"/>
-              <a:t>11/25/20</a:t>
+              <a:t>12/3/20</a:t>
             </a:fld>
             <a:endParaRPr lang="en-US"/>
           </a:p>
@@ -1317,7 +1317,7 @@
           <a:p>
             <a:fld id="{02AC24A9-CCB6-4F8D-B8DB-C2F3692CFA5A}" type="datetimeFigureOut">
               <a:rPr lang="en-US" smtClean="0"/>
-              <a:t>11/25/20</a:t>
+              <a:t>12/3/20</a:t>
             </a:fld>
             <a:endParaRPr lang="en-US"/>
           </a:p>
@@ -1771,7 +1771,7 @@
           <a:p>
             <a:fld id="{02AC24A9-CCB6-4F8D-B8DB-C2F3692CFA5A}" type="datetimeFigureOut">
               <a:rPr lang="en-US" smtClean="0"/>
-              <a:t>11/25/20</a:t>
+              <a:t>12/3/20</a:t>
             </a:fld>
             <a:endParaRPr lang="en-US"/>
           </a:p>
@@ -2303,7 +2303,7 @@
           <a:p>
             <a:fld id="{02AC24A9-CCB6-4F8D-B8DB-C2F3692CFA5A}" type="datetimeFigureOut">
               <a:rPr lang="en-US" smtClean="0"/>
-              <a:t>11/25/20</a:t>
+              <a:t>12/3/20</a:t>
             </a:fld>
             <a:endParaRPr lang="en-US"/>
           </a:p>
@@ -3002,7 +3002,7 @@
           <a:p>
             <a:fld id="{02AC24A9-CCB6-4F8D-B8DB-C2F3692CFA5A}" type="datetimeFigureOut">
               <a:rPr lang="en-US" smtClean="0"/>
-              <a:t>11/25/20</a:t>
+              <a:t>12/3/20</a:t>
             </a:fld>
             <a:endParaRPr lang="en-US"/>
           </a:p>
@@ -3331,7 +3331,7 @@
           <a:p>
             <a:fld id="{02AC24A9-CCB6-4F8D-B8DB-C2F3692CFA5A}" type="datetimeFigureOut">
               <a:rPr lang="en-US" smtClean="0"/>
-              <a:t>11/25/20</a:t>
+              <a:t>12/3/20</a:t>
             </a:fld>
             <a:endParaRPr lang="en-US"/>
           </a:p>
@@ -3444,7 +3444,7 @@
           <a:p>
             <a:fld id="{02AC24A9-CCB6-4F8D-B8DB-C2F3692CFA5A}" type="datetimeFigureOut">
               <a:rPr lang="en-US" smtClean="0"/>
-              <a:t>11/25/20</a:t>
+              <a:t>12/3/20</a:t>
             </a:fld>
             <a:endParaRPr lang="en-US"/>
           </a:p>
@@ -3939,7 +3939,7 @@
           <a:p>
             <a:fld id="{02AC24A9-CCB6-4F8D-B8DB-C2F3692CFA5A}" type="datetimeFigureOut">
               <a:rPr lang="en-US" smtClean="0"/>
-              <a:t>11/25/20</a:t>
+              <a:t>12/3/20</a:t>
             </a:fld>
             <a:endParaRPr lang="en-US" dirty="0"/>
           </a:p>
@@ -4416,7 +4416,7 @@
           <a:p>
             <a:fld id="{02AC24A9-CCB6-4F8D-B8DB-C2F3692CFA5A}" type="datetimeFigureOut">
               <a:rPr lang="en-US" smtClean="0"/>
-              <a:t>11/25/20</a:t>
+              <a:t>12/3/20</a:t>
             </a:fld>
             <a:endParaRPr lang="en-US"/>
           </a:p>
@@ -4659,7 +4659,7 @@
           <a:p>
             <a:fld id="{02AC24A9-CCB6-4F8D-B8DB-C2F3692CFA5A}" type="datetimeFigureOut">
               <a:rPr lang="en-US" smtClean="0"/>
-              <a:t>11/25/20</a:t>
+              <a:t>12/3/20</a:t>
             </a:fld>
             <a:endParaRPr lang="en-US"/>
           </a:p>
@@ -5533,6 +5533,48 @@
           </a:p>
         </p:txBody>
       </p:sp>
+      <p:sp>
+        <p:nvSpPr>
+          <p:cNvPr id="10" name="Rectangle 9">
+            <a:extLst>
+              <a:ext uri="{FF2B5EF4-FFF2-40B4-BE49-F238E27FC236}">
+                <a16:creationId xmlns:a16="http://schemas.microsoft.com/office/drawing/2014/main" id="{777E9243-EBC3-6142-8A69-C4B14789DEEC}"/>
+              </a:ext>
+            </a:extLst>
+          </p:cNvPr>
+          <p:cNvSpPr/>
+          <p:nvPr/>
+        </p:nvSpPr>
+        <p:spPr>
+          <a:xfrm>
+            <a:off x="7490122" y="4118751"/>
+            <a:ext cx="4441950" cy="369332"/>
+          </a:xfrm>
+          <a:prstGeom prst="rect">
+            <a:avLst/>
+          </a:prstGeom>
+        </p:spPr>
+        <p:txBody>
+          <a:bodyPr wrap="square">
+            <a:spAutoFit/>
+          </a:bodyPr>
+          <a:lstStyle/>
+          <a:p>
+            <a:pPr algn="r"/>
+            <a:r>
+              <a:rPr lang="en-US" b="1" spc="200" dirty="0">
+                <a:latin typeface="American Typewriter" panose="02090604020004020304" pitchFamily="18" charset="77"/>
+              </a:rPr>
+              <a:t>Statistics for proteomics</a:t>
+            </a:r>
+            <a:endParaRPr lang="en-US" b="1" spc="200" dirty="0">
+              <a:solidFill>
+                <a:srgbClr val="FF0000"/>
+              </a:solidFill>
+            </a:endParaRPr>
+          </a:p>
+        </p:txBody>
+      </p:sp>
     </p:spTree>
     <p:extLst>
       <p:ext uri="{BB962C8B-B14F-4D97-AF65-F5344CB8AC3E}">
